--- a/deliverables/青岛红枫路交通事故_伤情与伤残简报_20260817.pptx
+++ b/deliverables/青岛红枫路交通事故_伤情与伤残简报_20260817.pptx
@@ -4032,7 +4032,7 @@
                 <a:latin typeface="Microsoft YaHei"/>
                 <a:ea typeface="Microsoft YaHei"/>
               </a:rPr>
-              <a:t>先走一般程序把对方扣死</a:t>
+              <a:t>朋友说公立二甲一定能报</a:t>
             </a:r>
           </a:p>
         </p:txBody>
@@ -4158,7 +4158,7 @@
                 <a:latin typeface="Microsoft YaHei"/>
                 <a:ea typeface="Microsoft YaHei"/>
               </a:rPr>
-              <a:t>没有发票的现金也算进去</a:t>
+              <a:t>装病 / 出院再入院绕考核</a:t>
             </a:r>
           </a:p>
         </p:txBody>
@@ -9191,7 +9191,7 @@
                 <a:latin typeface="Microsoft YaHei"/>
                 <a:ea typeface="Microsoft YaHei"/>
               </a:rPr>
-              <a:t>治疗不要断档</a:t>
+              <a:t>转院报销卡住了</a:t>
             </a:r>
           </a:p>
         </p:txBody>
@@ -9227,7 +9227,7 @@
                 <a:latin typeface="Microsoft YaHei"/>
                 <a:ea typeface="Microsoft YaHei"/>
               </a:rPr>
-              <a:t>手术已经在三甲做完，这是有利起点</a:t>
+              <a:t>人已到人民医院，齐鲁出院未办，二甲入院办不成</a:t>
             </a:r>
           </a:p>
         </p:txBody>
@@ -9277,7 +9277,7 @@
                 <a:latin typeface="Microsoft YaHei"/>
                 <a:ea typeface="Microsoft YaHei"/>
               </a:rPr>
-              <a:t>8月14日急诊骨科 CT → 8月15日手足与显微重建外科术后 CT：齐鲁医院三甲闭环。</a:t>
+              <a:t>今天第一优先：办齐鲁出院结算，再办人民医院入院。人在床上没有住院号最危险。</a:t>
             </a:r>
           </a:p>
           <a:p>
@@ -9304,7 +9304,7 @@
                 <a:latin typeface="Microsoft YaHei"/>
                 <a:ea typeface="Microsoft YaHei"/>
               </a:rPr>
-              <a:t>交通事故就医默认三甲。转二甲（市北区人民医院）有理赔不确定风险。</a:t>
+              <a:t>朋友说公立二甲一般能报。对方自己只是骨裂、没住院，不能当保单条款。</a:t>
             </a:r>
           </a:p>
           <a:p>
@@ -9331,7 +9331,7 @@
                 <a:latin typeface="Microsoft YaHei"/>
                 <a:ea typeface="Microsoft YaHei"/>
               </a:rPr>
-              <a:t>交警说同路段有二甲先例，但不能书面保证。要留痕，不能只听「应该没问题」。</a:t>
+              <a:t>家属会后口径正确：二甲能不能报，保险公司说了算。保险说不行就不能住。</a:t>
             </a:r>
           </a:p>
           <a:p>
@@ -9358,7 +9358,7 @@
                 <a:latin typeface="Microsoft YaHei"/>
                 <a:ea typeface="Microsoft YaHei"/>
               </a:rPr>
-              <a:t>跨院必须先结算再入院。这是硬规则。</a:t>
+              <a:t>交警默认三甲，同路段有二甲先例，但不能书面保证。要留痕。</a:t>
             </a:r>
           </a:p>
           <a:p>
@@ -9385,7 +9385,7 @@
                 <a:latin typeface="Microsoft YaHei"/>
                 <a:ea typeface="Microsoft YaHei"/>
               </a:rPr>
-              <a:t>赛主任要交警电话：可以给，公对公。不要家属扮演交警。</a:t>
+              <a:t>不做：装病拒出院、出院再入院绕考核、代扮交警、把人社局当评残入口。</a:t>
             </a:r>
           </a:p>
           <a:p>
@@ -9412,7 +9412,7 @@
                 <a:latin typeface="Microsoft YaHei"/>
                 <a:ea typeface="Microsoft YaHei"/>
               </a:rPr>
-              <a:t>目标：尽量留在或转回三甲连续治疗；若暂留二甲，书面确认接收交通事故伤者。</a:t>
+              <a:t>手术已在齐鲁三甲完成。无论住哪，都要说清为什么转、转到哪一级。</a:t>
             </a:r>
           </a:p>
         </p:txBody>
@@ -9662,7 +9662,7 @@
                 <a:latin typeface="Microsoft YaHei"/>
                 <a:ea typeface="Microsoft YaHei"/>
               </a:rPr>
-              <a:t>残级、总包死价，本周不谈</a:t>
+              <a:t>先打通住院身份。残级、总包死价不谈</a:t>
             </a:r>
           </a:p>
         </p:txBody>
@@ -9744,7 +9744,7 @@
                 <a:latin typeface="Microsoft YaHei"/>
                 <a:ea typeface="Microsoft YaHei"/>
               </a:rPr>
-              <a:t>1  存 CT</a:t>
+              <a:t>1  办出院入院</a:t>
             </a:r>
           </a:p>
         </p:txBody>
@@ -9780,7 +9780,7 @@
                 <a:latin typeface="Microsoft YaHei"/>
                 <a:ea typeface="Microsoft YaHei"/>
               </a:rPr>
-              <a:t>三份报告、检查号、影像入口全部下载</a:t>
+              <a:t>齐鲁结算 → 人民医院入院，避免空窗</a:t>
             </a:r>
           </a:p>
         </p:txBody>
@@ -9862,7 +9862,7 @@
                 <a:latin typeface="Microsoft YaHei"/>
                 <a:ea typeface="Microsoft YaHei"/>
               </a:rPr>
-              <a:t>2  要病历</a:t>
+              <a:t>2  问保险公司</a:t>
             </a:r>
           </a:p>
         </p:txBody>
@@ -9898,7 +9898,7 @@
                 <a:latin typeface="Microsoft YaHei"/>
                 <a:ea typeface="Microsoft YaHei"/>
               </a:rPr>
-              <a:t>入院、手术、医嘱、费用明细、发票</a:t>
+              <a:t>交警要美团保险电话：二甲到底认不认</a:t>
             </a:r>
           </a:p>
         </p:txBody>
@@ -9980,7 +9980,7 @@
                 <a:latin typeface="Microsoft YaHei"/>
                 <a:ea typeface="Microsoft YaHei"/>
               </a:rPr>
-              <a:t>3  不断治</a:t>
+              <a:t>3  存病历发票</a:t>
             </a:r>
           </a:p>
         </p:txBody>
@@ -10016,7 +10016,7 @@
                 <a:latin typeface="Microsoft YaHei"/>
                 <a:ea typeface="Microsoft YaHei"/>
               </a:rPr>
-              <a:t>按医院规则结算，避免无法入院</a:t>
+              <a:t>三份 CT、手术记录、费用明细</a:t>
             </a:r>
           </a:p>
         </p:txBody>
@@ -10098,7 +10098,7 @@
                 <a:latin typeface="Microsoft YaHei"/>
                 <a:ea typeface="Microsoft YaHei"/>
               </a:rPr>
-              <a:t>4  医院级别</a:t>
+              <a:t>4  公对公留痕</a:t>
             </a:r>
           </a:p>
         </p:txBody>
@@ -10134,7 +10134,7 @@
                 <a:latin typeface="Microsoft YaHei"/>
                 <a:ea typeface="Microsoft YaHei"/>
               </a:rPr>
-              <a:t>交警与赛主任公对公留痕</a:t>
+              <a:t>交警电话给赛主任，不换号不代扮</a:t>
             </a:r>
           </a:p>
         </p:txBody>

--- a/deliverables/青岛红枫路交通事故_伤情与伤残简报_20260817.pptx
+++ b/deliverables/青岛红枫路交通事故_伤情与伤残简报_20260817.pptx
@@ -3654,7 +3654,7 @@
                 <a:latin typeface="Microsoft YaHei"/>
                 <a:ea typeface="Microsoft YaHei"/>
               </a:rPr>
-              <a:t>对方全责</a:t>
+              <a:t>对方全责 / 已经几级伤残</a:t>
             </a:r>
           </a:p>
         </p:txBody>
@@ -3780,7 +3780,7 @@
                 <a:latin typeface="Microsoft YaHei"/>
                 <a:ea typeface="Microsoft YaHei"/>
               </a:rPr>
-              <a:t>已经几级伤残</a:t>
+              <a:t>右脚后跟粉碎性骨折</a:t>
             </a:r>
           </a:p>
         </p:txBody>
@@ -3906,7 +3906,7 @@
                 <a:latin typeface="Microsoft YaHei"/>
                 <a:ea typeface="Microsoft YaHei"/>
               </a:rPr>
-              <a:t>右脚后跟粉碎性骨折</a:t>
+              <a:t>医保能报就是美团险能报</a:t>
             </a:r>
           </a:p>
         </p:txBody>
@@ -4032,7 +4032,7 @@
                 <a:latin typeface="Microsoft YaHei"/>
                 <a:ea typeface="Microsoft YaHei"/>
               </a:rPr>
-              <a:t>朋友说公立二甲一定能报</a:t>
+              <a:t>已经是康复期</a:t>
             </a:r>
           </a:p>
         </p:txBody>
@@ -9304,7 +9304,7 @@
                 <a:latin typeface="Microsoft YaHei"/>
                 <a:ea typeface="Microsoft YaHei"/>
               </a:rPr>
-              <a:t>朋友说公立二甲一般能报。对方自己只是骨裂、没住院，不能当保单条款。</a:t>
+              <a:t>医保能报，不等于美团平台险能报。两条分开问。向保险报医院全称。</a:t>
             </a:r>
           </a:p>
           <a:p>
@@ -9331,7 +9331,7 @@
                 <a:latin typeface="Microsoft YaHei"/>
                 <a:ea typeface="Microsoft YaHei"/>
               </a:rPr>
-              <a:t>家属会后口径正确：二甲能不能报，保险公司说了算。保险说不行就不能住。</a:t>
+              <a:t>对方是外卖电动车，没有交强险。认定单上未必有人保/平安。找美团平台险。</a:t>
             </a:r>
           </a:p>
           <a:p>
@@ -9358,7 +9358,7 @@
                 <a:latin typeface="Microsoft YaHei"/>
                 <a:ea typeface="Microsoft YaHei"/>
               </a:rPr>
-              <a:t>交警默认三甲，同路段有二甲先例，但不能书面保证。要留痕。</a:t>
+              <a:t>术后两天不是康复期。8月15日CT仍写软组织肿胀，不能按朋友说的「已经康复」处理。</a:t>
             </a:r>
           </a:p>
           <a:p>
@@ -9385,7 +9385,7 @@
                 <a:latin typeface="Microsoft YaHei"/>
                 <a:ea typeface="Microsoft YaHei"/>
               </a:rPr>
-              <a:t>不做：装病拒出院、出院再入院绕考核、代扮交警、把人社局当评残入口。</a:t>
+              <a:t>院方说联合体、同一家医院；父亲好说话才同意。主治强硬，青岛没有上海那种关系。</a:t>
             </a:r>
           </a:p>
           <a:p>
@@ -9412,7 +9412,7 @@
                 <a:latin typeface="Microsoft YaHei"/>
                 <a:ea typeface="Microsoft YaHei"/>
               </a:rPr>
-              <a:t>手术已在齐鲁三甲完成。无论住哪，都要说清为什么转、转到哪一级。</a:t>
+              <a:t>不做：装病、出院再入院绕考核、代扮交警、另找别的三甲碰运气。</a:t>
             </a:r>
           </a:p>
         </p:txBody>
@@ -9862,7 +9862,7 @@
                 <a:latin typeface="Microsoft YaHei"/>
                 <a:ea typeface="Microsoft YaHei"/>
               </a:rPr>
-              <a:t>2  问保险公司</a:t>
+              <a:t>2  问美团险</a:t>
             </a:r>
           </a:p>
         </p:txBody>
@@ -9898,7 +9898,7 @@
                 <a:latin typeface="Microsoft YaHei"/>
                 <a:ea typeface="Microsoft YaHei"/>
               </a:rPr>
-              <a:t>交警要美团保险电话：二甲到底认不认</a:t>
+              <a:t>不是交强险。报医院全称：市北区人民医院</a:t>
             </a:r>
           </a:p>
         </p:txBody>

--- a/deliverables/青岛红枫路交通事故_伤情与伤残简报_20260817.pptx
+++ b/deliverables/青岛红枫路交通事故_伤情与伤残简报_20260817.pptx
@@ -9191,7 +9191,7 @@
                 <a:latin typeface="Microsoft YaHei"/>
                 <a:ea typeface="Microsoft YaHei"/>
               </a:rPr>
-              <a:t>转院报销卡住了</a:t>
+              <a:t>医院怎么选</a:t>
             </a:r>
           </a:p>
         </p:txBody>
@@ -9227,7 +9227,7 @@
                 <a:latin typeface="Microsoft YaHei"/>
                 <a:ea typeface="Microsoft YaHei"/>
               </a:rPr>
-              <a:t>人已到人民医院，齐鲁出院未办，二甲入院办不成</a:t>
+              <a:t>不转其他三甲。首选齐鲁，次选人民医院，前提是保险认、住院号办成</a:t>
             </a:r>
           </a:p>
         </p:txBody>
@@ -9240,8 +9240,8 @@
         </p:nvSpPr>
         <p:spPr>
           <a:xfrm>
-            <a:off x="502920" y="1188720"/>
-            <a:ext cx="11155680" cy="5029200"/>
+            <a:off x="502920" y="1143000"/>
+            <a:ext cx="11155680" cy="5120640"/>
           </a:xfrm>
           <a:prstGeom prst="rect">
             <a:avLst/>
@@ -9256,11 +9256,11 @@
           <a:p>
             <a:pPr algn="l">
               <a:lnSpc>
-                <a:spcPct val="122000"/>
+                <a:spcPct val="118000"/>
               </a:lnSpc>
             </a:pPr>
             <a:r>
-              <a:rPr sz="1600" b="0">
+              <a:rPr sz="1500" b="0">
                 <a:solidFill>
                   <a:srgbClr val="C4A35A"/>
                 </a:solidFill>
@@ -9270,24 +9270,24 @@
               <a:t>●  </a:t>
             </a:r>
             <a:r>
-              <a:rPr sz="1600" b="0">
+              <a:rPr sz="1500" b="0">
                 <a:solidFill>
                   <a:srgbClr val="1F2A37"/>
                 </a:solidFill>
                 <a:latin typeface="Microsoft YaHei"/>
                 <a:ea typeface="Microsoft YaHei"/>
               </a:rPr>
-              <a:t>今天第一优先：办齐鲁出院结算，再办人民医院入院。人在床上没有住院号最危险。</a:t>
+              <a:t>今天：办齐鲁出院，结束没有住院号的空窗。同时问赛主任能否收回；问美团险认不认人民医院。</a:t>
             </a:r>
           </a:p>
           <a:p>
             <a:pPr algn="l">
               <a:lnSpc>
-                <a:spcPct val="122000"/>
+                <a:spcPct val="118000"/>
               </a:lnSpc>
             </a:pPr>
             <a:r>
-              <a:rPr sz="1600" b="0">
+              <a:rPr sz="1500" b="0">
                 <a:solidFill>
                   <a:srgbClr val="C4A35A"/>
                 </a:solidFill>
@@ -9297,24 +9297,24 @@
               <a:t>●  </a:t>
             </a:r>
             <a:r>
-              <a:rPr sz="1600" b="0">
+              <a:rPr sz="1500" b="0">
                 <a:solidFill>
                   <a:srgbClr val="1F2A37"/>
                 </a:solidFill>
                 <a:latin typeface="Microsoft YaHei"/>
                 <a:ea typeface="Microsoft YaHei"/>
               </a:rPr>
-              <a:t>医保能报，不等于美团平台险能报。两条分开问。向保险报医院全称。</a:t>
+              <a:t>齐鲁能收回 → 回齐鲁。手术组在、三甲、交警口径、病历连续。这是首选。</a:t>
             </a:r>
           </a:p>
           <a:p>
             <a:pPr algn="l">
               <a:lnSpc>
-                <a:spcPct val="122000"/>
+                <a:spcPct val="118000"/>
               </a:lnSpc>
             </a:pPr>
             <a:r>
-              <a:rPr sz="1600" b="0">
+              <a:rPr sz="1500" b="0">
                 <a:solidFill>
                   <a:srgbClr val="C4A35A"/>
                 </a:solidFill>
@@ -9324,24 +9324,24 @@
               <a:t>●  </a:t>
             </a:r>
             <a:r>
-              <a:rPr sz="1600" b="0">
+              <a:rPr sz="1500" b="0">
                 <a:solidFill>
                   <a:srgbClr val="1F2A37"/>
                 </a:solidFill>
                 <a:latin typeface="Microsoft YaHei"/>
                 <a:ea typeface="Microsoft YaHei"/>
               </a:rPr>
-              <a:t>对方是外卖电动车，没有交强险。认定单上未必有人保/平安。找美团平台险。</a:t>
+              <a:t>齐鲁收不回 + 美团险确认可赔 → 暂留市北区人民医院。赛主任查房要落实。发热、伤口、外固定异常立刻回三甲。</a:t>
             </a:r>
           </a:p>
           <a:p>
             <a:pPr algn="l">
               <a:lnSpc>
-                <a:spcPct val="122000"/>
+                <a:spcPct val="118000"/>
               </a:lnSpc>
             </a:pPr>
             <a:r>
-              <a:rPr sz="1600" b="0">
+              <a:rPr sz="1500" b="0">
                 <a:solidFill>
                   <a:srgbClr val="C4A35A"/>
                 </a:solidFill>
@@ -9351,24 +9351,24 @@
               <a:t>●  </a:t>
             </a:r>
             <a:r>
-              <a:rPr sz="1600" b="0">
+              <a:rPr sz="1500" b="0">
                 <a:solidFill>
                   <a:srgbClr val="1F2A37"/>
                 </a:solidFill>
                 <a:latin typeface="Microsoft YaHei"/>
                 <a:ea typeface="Microsoft YaHei"/>
               </a:rPr>
-              <a:t>术后两天不是康复期。8月15日CT仍写软组织肿胀，不能按朋友说的「已经康复」处理。</a:t>
+              <a:t>美团险不认人民医院 → 不要留。请保险对接三甲，家属不自己满城找床。</a:t>
             </a:r>
           </a:p>
           <a:p>
             <a:pPr algn="l">
               <a:lnSpc>
-                <a:spcPct val="122000"/>
+                <a:spcPct val="118000"/>
               </a:lnSpc>
             </a:pPr>
             <a:r>
-              <a:rPr sz="1600" b="0">
+              <a:rPr sz="1500" b="0">
                 <a:solidFill>
                   <a:srgbClr val="C4A35A"/>
                 </a:solidFill>
@@ -9378,24 +9378,24 @@
               <a:t>●  </a:t>
             </a:r>
             <a:r>
-              <a:rPr sz="1600" b="0">
+              <a:rPr sz="1500" b="0">
                 <a:solidFill>
                   <a:srgbClr val="1F2A37"/>
                 </a:solidFill>
                 <a:latin typeface="Microsoft YaHei"/>
                 <a:ea typeface="Microsoft YaHei"/>
               </a:rPr>
-              <a:t>院方说联合体、同一家医院；父亲好说话才同意。主治强硬，青岛没有上海那种关系。</a:t>
+              <a:t>其他三甲：末选。外固定再搬一次风险大，别人也难收一个月占床。</a:t>
             </a:r>
           </a:p>
           <a:p>
             <a:pPr algn="l">
               <a:lnSpc>
-                <a:spcPct val="122000"/>
+                <a:spcPct val="118000"/>
               </a:lnSpc>
             </a:pPr>
             <a:r>
-              <a:rPr sz="1600" b="0">
+              <a:rPr sz="1500" b="0">
                 <a:solidFill>
                   <a:srgbClr val="C4A35A"/>
                 </a:solidFill>
@@ -9405,14 +9405,14 @@
               <a:t>●  </a:t>
             </a:r>
             <a:r>
-              <a:rPr sz="1600" b="0">
+              <a:rPr sz="1500" b="0">
                 <a:solidFill>
                   <a:srgbClr val="1F2A37"/>
                 </a:solidFill>
                 <a:latin typeface="Microsoft YaHei"/>
                 <a:ea typeface="Microsoft YaHei"/>
               </a:rPr>
-              <a:t>不做：装病、出院再入院绕考核、代扮交警、另找别的三甲碰运气。</a:t>
+              <a:t>对赛主任：术后两天不是康复期，二甲还办不了入院。要么收回，要么马上办完出院。不闹、不装病。</a:t>
             </a:r>
           </a:p>
         </p:txBody>
@@ -9744,7 +9744,7 @@
                 <a:latin typeface="Microsoft YaHei"/>
                 <a:ea typeface="Microsoft YaHei"/>
               </a:rPr>
-              <a:t>1  办出院入院</a:t>
+              <a:t>1  问齐鲁收回</a:t>
             </a:r>
           </a:p>
         </p:txBody>
@@ -9780,7 +9780,7 @@
                 <a:latin typeface="Microsoft YaHei"/>
                 <a:ea typeface="Microsoft YaHei"/>
               </a:rPr>
-              <a:t>齐鲁结算 → 人民医院入院，避免空窗</a:t>
+              <a:t>出院结算 + 问赛主任：术后两天能否收回</a:t>
             </a:r>
           </a:p>
         </p:txBody>
@@ -9898,7 +9898,7 @@
                 <a:latin typeface="Microsoft YaHei"/>
                 <a:ea typeface="Microsoft YaHei"/>
               </a:rPr>
-              <a:t>不是交强险。报医院全称：市北区人民医院</a:t>
+              <a:t>报全称：市北区人民医院抚顺路院区</a:t>
             </a:r>
           </a:p>
         </p:txBody>

--- a/deliverables/青岛红枫路交通事故_伤情与伤残简报_20260817.pptx
+++ b/deliverables/青岛红枫路交通事故_伤情与伤残简报_20260817.pptx
@@ -7954,7 +7954,7 @@
                 <a:latin typeface="Microsoft YaHei"/>
                 <a:ea typeface="Microsoft YaHei"/>
               </a:rPr>
-              <a:t>• 交警认定属机动车，无正规号牌</a:t>
+              <a:t>• 交警认定属机动车，无正规号牌（市场内部牌）</a:t>
             </a:r>
           </a:p>
           <a:p>
@@ -7967,7 +7967,7 @@
                 <a:latin typeface="Microsoft YaHei"/>
                 <a:ea typeface="Microsoft YaHei"/>
               </a:rPr>
-              <a:t>• 转向灯失灵</a:t>
+              <a:t>• 车主刘孝春，转向灯失灵仍交人使用</a:t>
             </a:r>
           </a:p>
           <a:p>
@@ -7980,7 +7980,7 @@
                 <a:latin typeface="Microsoft YaHei"/>
                 <a:ea typeface="Microsoft YaHei"/>
               </a:rPr>
-              <a:t>• 掉头先右靠再大弧度左拐</a:t>
+              <a:t>• 掉头先右靠再大弧度左拐；当时在为刘家卸货</a:t>
             </a:r>
           </a:p>
         </p:txBody>
@@ -8964,7 +8964,7 @@
                 <a:latin typeface="Microsoft YaHei"/>
                 <a:ea typeface="Microsoft YaHei"/>
               </a:rPr>
-              <a:t>费用两套口述（3.5万 / 7万）冲突，用发票重做台账。</a:t>
+              <a:t>刘孝春不替美团补差额；己方份额和车主过错另计。</a:t>
             </a:r>
           </a:p>
           <a:p>

--- a/deliverables/青岛红枫路交通事故_伤情与伤残简报_20260817.pptx
+++ b/deliverables/青岛红枫路交通事故_伤情与伤残简报_20260817.pptx
@@ -4320,7 +4320,7 @@
                 <a:latin typeface="Microsoft YaHei"/>
                 <a:ea typeface="Microsoft YaHei"/>
               </a:rPr>
-              <a:t>青岛红枫路交通事故 · 内部材料 · 2026-08-17 · 伤残尚未鉴定</a:t>
+              <a:t>青岛红枫路交通事故 · 内部材料 · 底稿 08-17 补充 08-19 · 伤残尚未鉴定</a:t>
             </a:r>
           </a:p>
         </p:txBody>
@@ -5316,7 +5316,7 @@
                 <a:latin typeface="Microsoft YaHei"/>
                 <a:ea typeface="Microsoft YaHei"/>
               </a:rPr>
-              <a:t>青岛红枫路交通事故 · 内部材料 · 2026-08-17 · 伤残尚未鉴定</a:t>
+              <a:t>青岛红枫路交通事故 · 内部材料 · 底稿 08-17 补充 08-19 · 伤残尚未鉴定</a:t>
             </a:r>
           </a:p>
         </p:txBody>
@@ -6277,7 +6277,7 @@
                 <a:latin typeface="Microsoft YaHei"/>
                 <a:ea typeface="Microsoft YaHei"/>
               </a:rPr>
-              <a:t>青岛红枫路交通事故 · 内部材料 · 2026-08-17 · 伤残尚未鉴定</a:t>
+              <a:t>青岛红枫路交通事故 · 内部材料 · 底稿 08-17 补充 08-19 · 伤残尚未鉴定</a:t>
             </a:r>
           </a:p>
         </p:txBody>
@@ -7143,7 +7143,7 @@
                 <a:latin typeface="Microsoft YaHei"/>
                 <a:ea typeface="Microsoft YaHei"/>
               </a:rPr>
-              <a:t>青岛红枫路交通事故 · 内部材料 · 2026-08-17 · 伤残尚未鉴定</a:t>
+              <a:t>青岛红枫路交通事故 · 内部材料 · 底稿 08-17 补充 08-19 · 伤残尚未鉴定</a:t>
             </a:r>
           </a:p>
         </p:txBody>
@@ -7578,7 +7578,7 @@
                 <a:latin typeface="Microsoft YaHei"/>
                 <a:ea typeface="Microsoft YaHei"/>
               </a:rPr>
-              <a:t>青岛红枫路交通事故 · 内部材料 · 2026-08-17 · 伤残尚未鉴定</a:t>
+              <a:t>青岛红枫路交通事故 · 内部材料 · 底稿 08-17 补充 08-19 · 伤残尚未鉴定</a:t>
             </a:r>
           </a:p>
         </p:txBody>
@@ -7792,7 +7792,7 @@
                 <a:latin typeface="Microsoft YaHei"/>
                 <a:ea typeface="Microsoft YaHei"/>
               </a:rPr>
-              <a:t>市北区 · 红枫路汽车市场外抚顺路 · 监控已调取</a:t>
+              <a:t>市北区 · 批发市场外市政道路护栏开口附近 · 地址以交警文书为准</a:t>
             </a:r>
           </a:p>
         </p:txBody>
@@ -7980,7 +7980,7 @@
                 <a:latin typeface="Microsoft YaHei"/>
                 <a:ea typeface="Microsoft YaHei"/>
               </a:rPr>
-              <a:t>• 掉头先右靠再大弧度左拐；当时在为刘家卸货</a:t>
+              <a:t>• 护栏开口先借道再大弧度左拐；当时在为刘家卸货</a:t>
             </a:r>
           </a:p>
         </p:txBody>
@@ -8348,7 +8348,7 @@
                 <a:latin typeface="Microsoft YaHei"/>
                 <a:ea typeface="Microsoft YaHei"/>
               </a:rPr>
-              <a:t>青岛红枫路交通事故 · 内部材料 · 2026-08-17 · 伤残尚未鉴定</a:t>
+              <a:t>青岛红枫路交通事故 · 内部材料 · 底稿 08-17 补充 08-19 · 伤残尚未鉴定</a:t>
             </a:r>
           </a:p>
         </p:txBody>
@@ -9013,7 +9013,7 @@
                 <a:latin typeface="Microsoft YaHei"/>
                 <a:ea typeface="Microsoft YaHei"/>
               </a:rPr>
-              <a:t>青岛红枫路交通事故 · 内部材料 · 2026-08-17 · 伤残尚未鉴定</a:t>
+              <a:t>青岛红枫路交通事故 · 内部材料 · 底稿 08-17 补充 08-19 · 伤残尚未鉴定</a:t>
             </a:r>
           </a:p>
         </p:txBody>
@@ -9448,7 +9448,7 @@
                 <a:latin typeface="Microsoft YaHei"/>
                 <a:ea typeface="Microsoft YaHei"/>
               </a:rPr>
-              <a:t>青岛红枫路交通事故 · 内部材料 · 2026-08-17 · 伤残尚未鉴定</a:t>
+              <a:t>青岛红枫路交通事故 · 内部材料 · 底稿 08-17 补充 08-19 · 伤残尚未鉴定</a:t>
             </a:r>
           </a:p>
         </p:txBody>
@@ -10406,7 +10406,7 @@
                 <a:latin typeface="Microsoft YaHei"/>
                 <a:ea typeface="Microsoft YaHei"/>
               </a:rPr>
-              <a:t>青岛红枫路交通事故 · 内部材料 · 2026-08-17 · 伤残尚未鉴定</a:t>
+              <a:t>青岛红枫路交通事故 · 内部材料 · 底稿 08-17 补充 08-19 · 伤残尚未鉴定</a:t>
             </a:r>
           </a:p>
         </p:txBody>

--- a/deliverables/青岛红枫路交通事故_伤情与伤残简报_20260817.pptx
+++ b/deliverables/青岛红枫路交通事故_伤情与伤残简报_20260817.pptx
@@ -7792,7 +7792,7 @@
                 <a:latin typeface="Microsoft YaHei"/>
                 <a:ea typeface="Microsoft YaHei"/>
               </a:rPr>
-              <a:t>市北区 · 批发市场外市政道路护栏开口附近 · 地址以交警文书为准</a:t>
+              <a:t>市北区 · 1号门斜坡护栏开口附近 · 地址以交警文书为准</a:t>
             </a:r>
           </a:p>
         </p:txBody>
@@ -7967,7 +7967,7 @@
                 <a:latin typeface="Microsoft YaHei"/>
                 <a:ea typeface="Microsoft YaHei"/>
               </a:rPr>
-              <a:t>• 车主刘孝春，转向灯失灵仍交人使用</a:t>
+              <a:t>• 车主刘孝春，转向灯和大灯都坏仍交人使用</a:t>
             </a:r>
           </a:p>
           <a:p>
@@ -7980,7 +7980,7 @@
                 <a:latin typeface="Microsoft YaHei"/>
                 <a:ea typeface="Microsoft YaHei"/>
               </a:rPr>
-              <a:t>• 护栏开口先借道再大弧度左拐；当时在为刘家卸货</a:t>
+              <a:t>• 1号门护栏开口借道掉头；卸完第一趟回装第二趟</a:t>
             </a:r>
           </a:p>
         </p:txBody>

--- a/deliverables/青岛红枫路交通事故_伤情与伤残简报_20260817.pptx
+++ b/deliverables/青岛红枫路交通事故_伤情与伤残简报_20260817.pptx
@@ -7792,7 +7792,7 @@
                 <a:latin typeface="Microsoft YaHei"/>
                 <a:ea typeface="Microsoft YaHei"/>
               </a:rPr>
-              <a:t>市北区 · 1号门斜坡护栏开口附近 · 地址以交警文书为准</a:t>
+              <a:t>抚顺路批发市场 · 抚顺路与哈尔滨路交叉口 · 认定书尚未出具</a:t>
             </a:r>
           </a:p>
         </p:txBody>
@@ -7954,7 +7954,7 @@
                 <a:latin typeface="Microsoft YaHei"/>
                 <a:ea typeface="Microsoft YaHei"/>
               </a:rPr>
-              <a:t>• 交警认定属机动车，无正规号牌（市场内部牌）</a:t>
+              <a:t>• 货运三轮，可能被认定机动车</a:t>
             </a:r>
           </a:p>
           <a:p>
@@ -7967,7 +7967,7 @@
                 <a:latin typeface="Microsoft YaHei"/>
                 <a:ea typeface="Microsoft YaHei"/>
               </a:rPr>
-              <a:t>• 车主刘孝春，转向灯和大灯都坏仍交人使用</a:t>
+              <a:t>• 仅抚顺路批发市场内部牌，无青岛市号牌</a:t>
             </a:r>
           </a:p>
           <a:p>
@@ -7980,7 +7980,20 @@
                 <a:latin typeface="Microsoft YaHei"/>
                 <a:ea typeface="Microsoft YaHei"/>
               </a:rPr>
-              <a:t>• 1号门护栏开口借道掉头；卸完第一趟回装第二趟</a:t>
+              <a:t>• 驾驶人有驾驶资格证书；左转向灯失灵</a:t>
+            </a:r>
+          </a:p>
+          <a:p>
+            <a:pPr algn="l"/>
+            <a:r>
+              <a:rPr sz="1200" b="0">
+                <a:solidFill>
+                  <a:srgbClr val="1F2A37"/>
+                </a:solidFill>
+                <a:latin typeface="Microsoft YaHei"/>
+                <a:ea typeface="Microsoft YaHei"/>
+              </a:rPr>
+              <a:t>• 护栏开口借道，先右再左大弧度</a:t>
             </a:r>
           </a:p>
         </p:txBody>

--- a/deliverables/青岛红枫路交通事故_伤情与伤残简报_20260817.pptx
+++ b/deliverables/青岛红枫路交通事故_伤情与伤残简报_20260817.pptx
@@ -4284,7 +4284,7 @@
                 <a:latin typeface="Microsoft YaHei"/>
                 <a:ea typeface="Microsoft YaHei"/>
               </a:rPr>
-              <a:t>一次性打包，以后不再找你们</a:t>
+              <a:t>现在谈总赔偿数额 / 一次性打包了结</a:t>
             </a:r>
           </a:p>
         </p:txBody>
@@ -9675,7 +9675,7 @@
                 <a:latin typeface="Microsoft YaHei"/>
                 <a:ea typeface="Microsoft YaHei"/>
               </a:rPr>
-              <a:t>先打通住院身份。残级、总包死价不谈</a:t>
+              <a:t>先固定证据和住院身份。现在不谈总赔偿数额</a:t>
             </a:r>
           </a:p>
         </p:txBody>
@@ -10383,7 +10383,7 @@
                 <a:latin typeface="Microsoft YaHei"/>
                 <a:ea typeface="Microsoft YaHei"/>
               </a:rPr>
-              <a:t>不谈残级，不签一次性了结</a:t>
+              <a:t>不谈总赔偿数额，不报残级，不签了结</a:t>
             </a:r>
           </a:p>
         </p:txBody>

--- a/deliverables/青岛红枫路交通事故_伤情与伤残简报_20260817.pptx
+++ b/deliverables/青岛红枫路交通事故_伤情与伤残简报_20260817.pptx
@@ -9639,7 +9639,7 @@
                 <a:latin typeface="Microsoft YaHei"/>
                 <a:ea typeface="Microsoft YaHei"/>
               </a:rPr>
-              <a:t>本周只做六件事</a:t>
+              <a:t>本周先办这些</a:t>
             </a:r>
           </a:p>
         </p:txBody>
@@ -9675,7 +9675,7 @@
                 <a:latin typeface="Microsoft YaHei"/>
                 <a:ea typeface="Microsoft YaHei"/>
               </a:rPr>
-              <a:t>先固定证据和住院身份。现在不谈总赔偿数额</a:t>
+              <a:t>转院只看三点。费用核 4 万元。现在不谈总赔偿数额</a:t>
             </a:r>
           </a:p>
         </p:txBody>

--- a/deliverables/青岛红枫路交通事故_伤情与伤残简报_20260817.pptx
+++ b/deliverables/青岛红枫路交通事故_伤情与伤残简报_20260817.pptx
@@ -9204,7 +9204,7 @@
                 <a:latin typeface="Microsoft YaHei"/>
                 <a:ea typeface="Microsoft YaHei"/>
               </a:rPr>
-              <a:t>医院怎么选</a:t>
+              <a:t>转院与保险：核心只三点</a:t>
             </a:r>
           </a:p>
         </p:txBody>
@@ -9240,206 +9240,111 @@
                 <a:latin typeface="Microsoft YaHei"/>
                 <a:ea typeface="Microsoft YaHei"/>
               </a:rPr>
-              <a:t>不转其他三甲。首选齐鲁，次选人民医院，前提是保险认、住院号办成</a:t>
-            </a:r>
-          </a:p>
-        </p:txBody>
-      </p:sp>
-      <p:sp>
-        <p:nvSpPr>
-          <p:cNvPr id="6" name="TextBox 5"/>
+              <a:t>这些材料大量重复。不另找三甲。费用按 4 万元核清</a:t>
+            </a:r>
+          </a:p>
+        </p:txBody>
+      </p:sp>
+      <p:sp>
+        <p:nvSpPr>
+          <p:cNvPr id="6" name="Rounded Rectangle 5"/>
+          <p:cNvSpPr/>
+          <p:nvPr/>
+        </p:nvSpPr>
+        <p:spPr>
+          <a:xfrm>
+            <a:off x="411480" y="1143000"/>
+            <a:ext cx="3657600" cy="5029200"/>
+          </a:xfrm>
+          <a:prstGeom prst="roundRect">
+            <a:avLst>
+              <a:gd name="adj" fmla="val 8000"/>
+            </a:avLst>
+          </a:prstGeom>
+          <a:solidFill>
+            <a:srgbClr val="F3F6FA"/>
+          </a:solidFill>
+          <a:ln>
+            <a:noFill/>
+          </a:ln>
+          <a:effectLst/>
+        </p:spPr>
+        <p:style>
+          <a:lnRef idx="1">
+            <a:schemeClr val="accent1"/>
+          </a:lnRef>
+          <a:fillRef idx="3">
+            <a:schemeClr val="accent1"/>
+          </a:fillRef>
+          <a:effectRef idx="2">
+            <a:schemeClr val="accent1"/>
+          </a:effectRef>
+          <a:fontRef idx="minor">
+            <a:schemeClr val="lt1"/>
+          </a:fontRef>
+        </p:style>
+        <p:txBody>
+          <a:bodyPr rtlCol="0" anchor="ctr"/>
+          <a:lstStyle/>
+          <a:p>
+            <a:pPr algn="ctr"/>
+          </a:p>
+        </p:txBody>
+      </p:sp>
+      <p:sp>
+        <p:nvSpPr>
+          <p:cNvPr id="7" name="Rectangle 6"/>
+          <p:cNvSpPr/>
+          <p:nvPr/>
+        </p:nvSpPr>
+        <p:spPr>
+          <a:xfrm>
+            <a:off x="411480" y="1143000"/>
+            <a:ext cx="73152" cy="5029200"/>
+          </a:xfrm>
+          <a:prstGeom prst="rect">
+            <a:avLst/>
+          </a:prstGeom>
+          <a:solidFill>
+            <a:srgbClr val="2F6B4F"/>
+          </a:solidFill>
+          <a:ln>
+            <a:noFill/>
+          </a:ln>
+          <a:effectLst/>
+        </p:spPr>
+        <p:style>
+          <a:lnRef idx="1">
+            <a:schemeClr val="accent1"/>
+          </a:lnRef>
+          <a:fillRef idx="3">
+            <a:schemeClr val="accent1"/>
+          </a:fillRef>
+          <a:effectRef idx="2">
+            <a:schemeClr val="accent1"/>
+          </a:effectRef>
+          <a:fontRef idx="minor">
+            <a:schemeClr val="lt1"/>
+          </a:fontRef>
+        </p:style>
+        <p:txBody>
+          <a:bodyPr rtlCol="0" anchor="ctr"/>
+          <a:lstStyle/>
+          <a:p>
+            <a:pPr algn="ctr"/>
+          </a:p>
+        </p:txBody>
+      </p:sp>
+      <p:sp>
+        <p:nvSpPr>
+          <p:cNvPr id="8" name="TextBox 7"/>
           <p:cNvSpPr txBox="1"/>
           <p:nvPr/>
         </p:nvSpPr>
         <p:spPr>
           <a:xfrm>
-            <a:off x="502920" y="1143000"/>
-            <a:ext cx="11155680" cy="5120640"/>
-          </a:xfrm>
-          <a:prstGeom prst="rect">
-            <a:avLst/>
-          </a:prstGeom>
-          <a:noFill/>
-        </p:spPr>
-        <p:txBody>
-          <a:bodyPr wrap="square" lIns="0" rIns="0" tIns="0" bIns="0">
-            <a:spAutoFit/>
-          </a:bodyPr>
-          <a:lstStyle/>
-          <a:p>
-            <a:pPr algn="l">
-              <a:lnSpc>
-                <a:spcPct val="118000"/>
-              </a:lnSpc>
-            </a:pPr>
-            <a:r>
-              <a:rPr sz="1500" b="0">
-                <a:solidFill>
-                  <a:srgbClr val="C4A35A"/>
-                </a:solidFill>
-                <a:latin typeface="Microsoft YaHei"/>
-                <a:ea typeface="Microsoft YaHei"/>
-              </a:rPr>
-              <a:t>●  </a:t>
-            </a:r>
-            <a:r>
-              <a:rPr sz="1500" b="0">
-                <a:solidFill>
-                  <a:srgbClr val="1F2A37"/>
-                </a:solidFill>
-                <a:latin typeface="Microsoft YaHei"/>
-                <a:ea typeface="Microsoft YaHei"/>
-              </a:rPr>
-              <a:t>今天：办齐鲁出院，结束没有住院号的空窗。同时问赛主任能否收回；问美团险认不认人民医院。</a:t>
-            </a:r>
-          </a:p>
-          <a:p>
-            <a:pPr algn="l">
-              <a:lnSpc>
-                <a:spcPct val="118000"/>
-              </a:lnSpc>
-            </a:pPr>
-            <a:r>
-              <a:rPr sz="1500" b="0">
-                <a:solidFill>
-                  <a:srgbClr val="C4A35A"/>
-                </a:solidFill>
-                <a:latin typeface="Microsoft YaHei"/>
-                <a:ea typeface="Microsoft YaHei"/>
-              </a:rPr>
-              <a:t>●  </a:t>
-            </a:r>
-            <a:r>
-              <a:rPr sz="1500" b="0">
-                <a:solidFill>
-                  <a:srgbClr val="1F2A37"/>
-                </a:solidFill>
-                <a:latin typeface="Microsoft YaHei"/>
-                <a:ea typeface="Microsoft YaHei"/>
-              </a:rPr>
-              <a:t>齐鲁能收回 → 回齐鲁。手术组在、三甲、交警口径、病历连续。这是首选。</a:t>
-            </a:r>
-          </a:p>
-          <a:p>
-            <a:pPr algn="l">
-              <a:lnSpc>
-                <a:spcPct val="118000"/>
-              </a:lnSpc>
-            </a:pPr>
-            <a:r>
-              <a:rPr sz="1500" b="0">
-                <a:solidFill>
-                  <a:srgbClr val="C4A35A"/>
-                </a:solidFill>
-                <a:latin typeface="Microsoft YaHei"/>
-                <a:ea typeface="Microsoft YaHei"/>
-              </a:rPr>
-              <a:t>●  </a:t>
-            </a:r>
-            <a:r>
-              <a:rPr sz="1500" b="0">
-                <a:solidFill>
-                  <a:srgbClr val="1F2A37"/>
-                </a:solidFill>
-                <a:latin typeface="Microsoft YaHei"/>
-                <a:ea typeface="Microsoft YaHei"/>
-              </a:rPr>
-              <a:t>齐鲁收不回 + 美团险确认可赔 → 暂留市北区人民医院。赛主任查房要落实。发热、伤口、外固定异常立刻回三甲。</a:t>
-            </a:r>
-          </a:p>
-          <a:p>
-            <a:pPr algn="l">
-              <a:lnSpc>
-                <a:spcPct val="118000"/>
-              </a:lnSpc>
-            </a:pPr>
-            <a:r>
-              <a:rPr sz="1500" b="0">
-                <a:solidFill>
-                  <a:srgbClr val="C4A35A"/>
-                </a:solidFill>
-                <a:latin typeface="Microsoft YaHei"/>
-                <a:ea typeface="Microsoft YaHei"/>
-              </a:rPr>
-              <a:t>●  </a:t>
-            </a:r>
-            <a:r>
-              <a:rPr sz="1500" b="0">
-                <a:solidFill>
-                  <a:srgbClr val="1F2A37"/>
-                </a:solidFill>
-                <a:latin typeface="Microsoft YaHei"/>
-                <a:ea typeface="Microsoft YaHei"/>
-              </a:rPr>
-              <a:t>美团险不认人民医院 → 不要留。请保险对接三甲，家属不自己满城找床。</a:t>
-            </a:r>
-          </a:p>
-          <a:p>
-            <a:pPr algn="l">
-              <a:lnSpc>
-                <a:spcPct val="118000"/>
-              </a:lnSpc>
-            </a:pPr>
-            <a:r>
-              <a:rPr sz="1500" b="0">
-                <a:solidFill>
-                  <a:srgbClr val="C4A35A"/>
-                </a:solidFill>
-                <a:latin typeface="Microsoft YaHei"/>
-                <a:ea typeface="Microsoft YaHei"/>
-              </a:rPr>
-              <a:t>●  </a:t>
-            </a:r>
-            <a:r>
-              <a:rPr sz="1500" b="0">
-                <a:solidFill>
-                  <a:srgbClr val="1F2A37"/>
-                </a:solidFill>
-                <a:latin typeface="Microsoft YaHei"/>
-                <a:ea typeface="Microsoft YaHei"/>
-              </a:rPr>
-              <a:t>其他三甲：末选。外固定再搬一次风险大，别人也难收一个月占床。</a:t>
-            </a:r>
-          </a:p>
-          <a:p>
-            <a:pPr algn="l">
-              <a:lnSpc>
-                <a:spcPct val="118000"/>
-              </a:lnSpc>
-            </a:pPr>
-            <a:r>
-              <a:rPr sz="1500" b="0">
-                <a:solidFill>
-                  <a:srgbClr val="C4A35A"/>
-                </a:solidFill>
-                <a:latin typeface="Microsoft YaHei"/>
-                <a:ea typeface="Microsoft YaHei"/>
-              </a:rPr>
-              <a:t>●  </a:t>
-            </a:r>
-            <a:r>
-              <a:rPr sz="1500" b="0">
-                <a:solidFill>
-                  <a:srgbClr val="1F2A37"/>
-                </a:solidFill>
-                <a:latin typeface="Microsoft YaHei"/>
-                <a:ea typeface="Microsoft YaHei"/>
-              </a:rPr>
-              <a:t>对赛主任：术后两天不是康复期，二甲还办不了入院。要么收回，要么马上办完出院。不闹、不装病。</a:t>
-            </a:r>
-          </a:p>
-        </p:txBody>
-      </p:sp>
-      <p:sp>
-        <p:nvSpPr>
-          <p:cNvPr id="7" name="TextBox 6"/>
-          <p:cNvSpPr txBox="1"/>
-          <p:nvPr/>
-        </p:nvSpPr>
-        <p:spPr>
-          <a:xfrm>
-            <a:off x="457200" y="6510528"/>
-            <a:ext cx="9875520" cy="256032"/>
+            <a:off x="612648" y="1252728"/>
+            <a:ext cx="3337560" cy="292608"/>
           </a:xfrm>
           <a:prstGeom prst="rect">
             <a:avLst/>
@@ -9454,6 +9359,480 @@
           <a:p>
             <a:pPr algn="l"/>
             <a:r>
+              <a:rPr sz="1300" b="1">
+                <a:solidFill>
+                  <a:srgbClr val="2F6B4F"/>
+                </a:solidFill>
+                <a:latin typeface="Microsoft YaHei"/>
+                <a:ea typeface="Microsoft YaHei"/>
+              </a:rPr>
+              <a:t>1. 先完成原医院结算</a:t>
+            </a:r>
+          </a:p>
+        </p:txBody>
+      </p:sp>
+      <p:sp>
+        <p:nvSpPr>
+          <p:cNvPr id="9" name="TextBox 8"/>
+          <p:cNvSpPr txBox="1"/>
+          <p:nvPr/>
+        </p:nvSpPr>
+        <p:spPr>
+          <a:xfrm>
+            <a:off x="612648" y="1545336"/>
+            <a:ext cx="3337560" cy="4526280"/>
+          </a:xfrm>
+          <a:prstGeom prst="rect">
+            <a:avLst/>
+          </a:prstGeom>
+          <a:noFill/>
+        </p:spPr>
+        <p:txBody>
+          <a:bodyPr wrap="square" lIns="0" rIns="0" tIns="0" bIns="0" anchor="t">
+            <a:spAutoFit/>
+          </a:bodyPr>
+          <a:lstStyle/>
+          <a:p>
+            <a:pPr algn="l"/>
+            <a:r>
+              <a:rPr sz="1200" b="0">
+                <a:solidFill>
+                  <a:srgbClr val="1F2A37"/>
+                </a:solidFill>
+                <a:latin typeface="Microsoft YaHei"/>
+                <a:ea typeface="Microsoft YaHei"/>
+              </a:rPr>
+              <a:t>齐鲁出院结算、33 床出院记录、押金原路退。跨院必须先结上一院，才能办人民医院入院。</a:t>
+            </a:r>
+          </a:p>
+          <a:p>
+            <a:pPr algn="l"/>
+            <a:r>
+              <a:rPr sz="1200" b="0">
+                <a:solidFill>
+                  <a:srgbClr val="1F2A37"/>
+                </a:solidFill>
+                <a:latin typeface="Microsoft YaHei"/>
+                <a:ea typeface="Microsoft YaHei"/>
+              </a:rPr>
+              <a:t/>
+            </a:r>
+          </a:p>
+          <a:p>
+            <a:pPr algn="l"/>
+            <a:r>
+              <a:rPr sz="1200" b="0">
+                <a:solidFill>
+                  <a:srgbClr val="1F2A37"/>
+                </a:solidFill>
+                <a:latin typeface="Microsoft YaHei"/>
+                <a:ea typeface="Microsoft YaHei"/>
+              </a:rPr>
+              <a:t>完成：齐鲁出院手续办完，人民医院能收材料。</a:t>
+            </a:r>
+          </a:p>
+        </p:txBody>
+      </p:sp>
+      <p:sp>
+        <p:nvSpPr>
+          <p:cNvPr id="10" name="Rounded Rectangle 9"/>
+          <p:cNvSpPr/>
+          <p:nvPr/>
+        </p:nvSpPr>
+        <p:spPr>
+          <a:xfrm>
+            <a:off x="4251960" y="1143000"/>
+            <a:ext cx="3657600" cy="5029200"/>
+          </a:xfrm>
+          <a:prstGeom prst="roundRect">
+            <a:avLst>
+              <a:gd name="adj" fmla="val 8000"/>
+            </a:avLst>
+          </a:prstGeom>
+          <a:solidFill>
+            <a:srgbClr val="F3F6FA"/>
+          </a:solidFill>
+          <a:ln>
+            <a:noFill/>
+          </a:ln>
+          <a:effectLst/>
+        </p:spPr>
+        <p:style>
+          <a:lnRef idx="1">
+            <a:schemeClr val="accent1"/>
+          </a:lnRef>
+          <a:fillRef idx="3">
+            <a:schemeClr val="accent1"/>
+          </a:fillRef>
+          <a:effectRef idx="2">
+            <a:schemeClr val="accent1"/>
+          </a:effectRef>
+          <a:fontRef idx="minor">
+            <a:schemeClr val="lt1"/>
+          </a:fontRef>
+        </p:style>
+        <p:txBody>
+          <a:bodyPr rtlCol="0" anchor="ctr"/>
+          <a:lstStyle/>
+          <a:p>
+            <a:pPr algn="ctr"/>
+          </a:p>
+        </p:txBody>
+      </p:sp>
+      <p:sp>
+        <p:nvSpPr>
+          <p:cNvPr id="11" name="Rectangle 10"/>
+          <p:cNvSpPr/>
+          <p:nvPr/>
+        </p:nvSpPr>
+        <p:spPr>
+          <a:xfrm>
+            <a:off x="4251960" y="1143000"/>
+            <a:ext cx="73152" cy="5029200"/>
+          </a:xfrm>
+          <a:prstGeom prst="rect">
+            <a:avLst/>
+          </a:prstGeom>
+          <a:solidFill>
+            <a:srgbClr val="0B2F5B"/>
+          </a:solidFill>
+          <a:ln>
+            <a:noFill/>
+          </a:ln>
+          <a:effectLst/>
+        </p:spPr>
+        <p:style>
+          <a:lnRef idx="1">
+            <a:schemeClr val="accent1"/>
+          </a:lnRef>
+          <a:fillRef idx="3">
+            <a:schemeClr val="accent1"/>
+          </a:fillRef>
+          <a:effectRef idx="2">
+            <a:schemeClr val="accent1"/>
+          </a:effectRef>
+          <a:fontRef idx="minor">
+            <a:schemeClr val="lt1"/>
+          </a:fontRef>
+        </p:style>
+        <p:txBody>
+          <a:bodyPr rtlCol="0" anchor="ctr"/>
+          <a:lstStyle/>
+          <a:p>
+            <a:pPr algn="ctr"/>
+          </a:p>
+        </p:txBody>
+      </p:sp>
+      <p:sp>
+        <p:nvSpPr>
+          <p:cNvPr id="12" name="TextBox 11"/>
+          <p:cNvSpPr txBox="1"/>
+          <p:nvPr/>
+        </p:nvSpPr>
+        <p:spPr>
+          <a:xfrm>
+            <a:off x="4453128" y="1252728"/>
+            <a:ext cx="3337560" cy="292608"/>
+          </a:xfrm>
+          <a:prstGeom prst="rect">
+            <a:avLst/>
+          </a:prstGeom>
+          <a:noFill/>
+        </p:spPr>
+        <p:txBody>
+          <a:bodyPr wrap="square" lIns="0" rIns="0" tIns="0" bIns="0" anchor="t">
+            <a:spAutoFit/>
+          </a:bodyPr>
+          <a:lstStyle/>
+          <a:p>
+            <a:pPr algn="l"/>
+            <a:r>
+              <a:rPr sz="1300" b="1">
+                <a:solidFill>
+                  <a:srgbClr val="0B2F5B"/>
+                </a:solidFill>
+                <a:latin typeface="Microsoft YaHei"/>
+                <a:ea typeface="Microsoft YaHei"/>
+              </a:rPr>
+              <a:t>2. 确认新医院能否正常入院</a:t>
+            </a:r>
+          </a:p>
+        </p:txBody>
+      </p:sp>
+      <p:sp>
+        <p:nvSpPr>
+          <p:cNvPr id="13" name="TextBox 12"/>
+          <p:cNvSpPr txBox="1"/>
+          <p:nvPr/>
+        </p:nvSpPr>
+        <p:spPr>
+          <a:xfrm>
+            <a:off x="4453128" y="1545336"/>
+            <a:ext cx="3337560" cy="4526280"/>
+          </a:xfrm>
+          <a:prstGeom prst="rect">
+            <a:avLst/>
+          </a:prstGeom>
+          <a:noFill/>
+        </p:spPr>
+        <p:txBody>
+          <a:bodyPr wrap="square" lIns="0" rIns="0" tIns="0" bIns="0" anchor="t">
+            <a:spAutoFit/>
+          </a:bodyPr>
+          <a:lstStyle/>
+          <a:p>
+            <a:pPr algn="l"/>
+            <a:r>
+              <a:rPr sz="1200" b="0">
+                <a:solidFill>
+                  <a:srgbClr val="1F2A37"/>
+                </a:solidFill>
+                <a:latin typeface="Microsoft YaHei"/>
+                <a:ea typeface="Microsoft YaHei"/>
+              </a:rPr>
+              <a:t>市北区人民医院（抚顺路院区）办住院号。医疗安全为先：手续卡住先问齐鲁能否收回，不要另找三甲碰运气。</a:t>
+            </a:r>
+          </a:p>
+          <a:p>
+            <a:pPr algn="l"/>
+            <a:r>
+              <a:rPr sz="1200" b="0">
+                <a:solidFill>
+                  <a:srgbClr val="1F2A37"/>
+                </a:solidFill>
+                <a:latin typeface="Microsoft YaHei"/>
+                <a:ea typeface="Microsoft YaHei"/>
+              </a:rPr>
+              <a:t/>
+            </a:r>
+          </a:p>
+          <a:p>
+            <a:pPr algn="l"/>
+            <a:r>
+              <a:rPr sz="1200" b="0">
+                <a:solidFill>
+                  <a:srgbClr val="1F2A37"/>
+                </a:solidFill>
+                <a:latin typeface="Microsoft YaHei"/>
+                <a:ea typeface="Microsoft YaHei"/>
+              </a:rPr>
+              <a:t>完成：住院号办成。</a:t>
+            </a:r>
+          </a:p>
+        </p:txBody>
+      </p:sp>
+      <p:sp>
+        <p:nvSpPr>
+          <p:cNvPr id="14" name="Rounded Rectangle 13"/>
+          <p:cNvSpPr/>
+          <p:nvPr/>
+        </p:nvSpPr>
+        <p:spPr>
+          <a:xfrm>
+            <a:off x="8092440" y="1143000"/>
+            <a:ext cx="3657600" cy="5029200"/>
+          </a:xfrm>
+          <a:prstGeom prst="roundRect">
+            <a:avLst>
+              <a:gd name="adj" fmla="val 8000"/>
+            </a:avLst>
+          </a:prstGeom>
+          <a:solidFill>
+            <a:srgbClr val="F3F6FA"/>
+          </a:solidFill>
+          <a:ln>
+            <a:noFill/>
+          </a:ln>
+          <a:effectLst/>
+        </p:spPr>
+        <p:style>
+          <a:lnRef idx="1">
+            <a:schemeClr val="accent1"/>
+          </a:lnRef>
+          <a:fillRef idx="3">
+            <a:schemeClr val="accent1"/>
+          </a:fillRef>
+          <a:effectRef idx="2">
+            <a:schemeClr val="accent1"/>
+          </a:effectRef>
+          <a:fontRef idx="minor">
+            <a:schemeClr val="lt1"/>
+          </a:fontRef>
+        </p:style>
+        <p:txBody>
+          <a:bodyPr rtlCol="0" anchor="ctr"/>
+          <a:lstStyle/>
+          <a:p>
+            <a:pPr algn="ctr"/>
+          </a:p>
+        </p:txBody>
+      </p:sp>
+      <p:sp>
+        <p:nvSpPr>
+          <p:cNvPr id="15" name="Rectangle 14"/>
+          <p:cNvSpPr/>
+          <p:nvPr/>
+        </p:nvSpPr>
+        <p:spPr>
+          <a:xfrm>
+            <a:off x="8092440" y="1143000"/>
+            <a:ext cx="73152" cy="5029200"/>
+          </a:xfrm>
+          <a:prstGeom prst="rect">
+            <a:avLst/>
+          </a:prstGeom>
+          <a:solidFill>
+            <a:srgbClr val="B57A2A"/>
+          </a:solidFill>
+          <a:ln>
+            <a:noFill/>
+          </a:ln>
+          <a:effectLst/>
+        </p:spPr>
+        <p:style>
+          <a:lnRef idx="1">
+            <a:schemeClr val="accent1"/>
+          </a:lnRef>
+          <a:fillRef idx="3">
+            <a:schemeClr val="accent1"/>
+          </a:fillRef>
+          <a:effectRef idx="2">
+            <a:schemeClr val="accent1"/>
+          </a:effectRef>
+          <a:fontRef idx="minor">
+            <a:schemeClr val="lt1"/>
+          </a:fontRef>
+        </p:style>
+        <p:txBody>
+          <a:bodyPr rtlCol="0" anchor="ctr"/>
+          <a:lstStyle/>
+          <a:p>
+            <a:pPr algn="ctr"/>
+          </a:p>
+        </p:txBody>
+      </p:sp>
+      <p:sp>
+        <p:nvSpPr>
+          <p:cNvPr id="16" name="TextBox 15"/>
+          <p:cNvSpPr txBox="1"/>
+          <p:nvPr/>
+        </p:nvSpPr>
+        <p:spPr>
+          <a:xfrm>
+            <a:off x="8293608" y="1252728"/>
+            <a:ext cx="3337560" cy="292608"/>
+          </a:xfrm>
+          <a:prstGeom prst="rect">
+            <a:avLst/>
+          </a:prstGeom>
+          <a:noFill/>
+        </p:spPr>
+        <p:txBody>
+          <a:bodyPr wrap="square" lIns="0" rIns="0" tIns="0" bIns="0" anchor="t">
+            <a:spAutoFit/>
+          </a:bodyPr>
+          <a:lstStyle/>
+          <a:p>
+            <a:pPr algn="l"/>
+            <a:r>
+              <a:rPr sz="1300" b="1">
+                <a:solidFill>
+                  <a:srgbClr val="B57A2A"/>
+                </a:solidFill>
+                <a:latin typeface="Microsoft YaHei"/>
+                <a:ea typeface="Microsoft YaHei"/>
+              </a:rPr>
+              <a:t>3. 向实际承保公司书面确认二甲赔付资格和比例</a:t>
+            </a:r>
+          </a:p>
+        </p:txBody>
+      </p:sp>
+      <p:sp>
+        <p:nvSpPr>
+          <p:cNvPr id="17" name="TextBox 16"/>
+          <p:cNvSpPr txBox="1"/>
+          <p:nvPr/>
+        </p:nvSpPr>
+        <p:spPr>
+          <a:xfrm>
+            <a:off x="8293608" y="1545336"/>
+            <a:ext cx="3337560" cy="4526280"/>
+          </a:xfrm>
+          <a:prstGeom prst="rect">
+            <a:avLst/>
+          </a:prstGeom>
+          <a:noFill/>
+        </p:spPr>
+        <p:txBody>
+          <a:bodyPr wrap="square" lIns="0" rIns="0" tIns="0" bIns="0" anchor="t">
+            <a:spAutoFit/>
+          </a:bodyPr>
+          <a:lstStyle/>
+          <a:p>
+            <a:pPr algn="l"/>
+            <a:r>
+              <a:rPr sz="1200" b="0">
+                <a:solidFill>
+                  <a:srgbClr val="1F2A37"/>
+                </a:solidFill>
+                <a:latin typeface="Microsoft YaHei"/>
+                <a:ea typeface="Microsoft YaHei"/>
+              </a:rPr>
+              <a:t>骑手拉群报案。要保单号、书面比例。不依赖交警、医院或非经办人员的口头判断。家属确认可以赔、比例待定，不等于书面已到。</a:t>
+            </a:r>
+          </a:p>
+          <a:p>
+            <a:pPr algn="l"/>
+            <a:r>
+              <a:rPr sz="1200" b="0">
+                <a:solidFill>
+                  <a:srgbClr val="1F2A37"/>
+                </a:solidFill>
+                <a:latin typeface="Microsoft YaHei"/>
+                <a:ea typeface="Microsoft YaHei"/>
+              </a:rPr>
+              <a:t/>
+            </a:r>
+          </a:p>
+          <a:p>
+            <a:pPr algn="l"/>
+            <a:r>
+              <a:rPr sz="1200" b="0">
+                <a:solidFill>
+                  <a:srgbClr val="1F2A37"/>
+                </a:solidFill>
+                <a:latin typeface="Microsoft YaHei"/>
+                <a:ea typeface="Microsoft YaHei"/>
+              </a:rPr>
+              <a:t>完成：书面或群内文字：认不认人民医院、比例多少。</a:t>
+            </a:r>
+          </a:p>
+        </p:txBody>
+      </p:sp>
+      <p:sp>
+        <p:nvSpPr>
+          <p:cNvPr id="18" name="TextBox 17"/>
+          <p:cNvSpPr txBox="1"/>
+          <p:nvPr/>
+        </p:nvSpPr>
+        <p:spPr>
+          <a:xfrm>
+            <a:off x="457200" y="6510528"/>
+            <a:ext cx="9875520" cy="256032"/>
+          </a:xfrm>
+          <a:prstGeom prst="rect">
+            <a:avLst/>
+          </a:prstGeom>
+          <a:noFill/>
+        </p:spPr>
+        <p:txBody>
+          <a:bodyPr wrap="square" lIns="0" rIns="0" tIns="0" bIns="0" anchor="t">
+            <a:spAutoFit/>
+          </a:bodyPr>
+          <a:lstStyle/>
+          <a:p>
+            <a:pPr algn="l"/>
+            <a:r>
               <a:rPr sz="1000" b="0">
                 <a:solidFill>
                   <a:srgbClr val="5C6B7A"/>
@@ -9468,7 +9847,7 @@
       </p:sp>
       <p:sp>
         <p:nvSpPr>
-          <p:cNvPr id="8" name="TextBox 7"/>
+          <p:cNvPr id="19" name="TextBox 18"/>
           <p:cNvSpPr txBox="1"/>
           <p:nvPr/>
         </p:nvSpPr>
@@ -9639,7 +10018,7 @@
                 <a:latin typeface="Microsoft YaHei"/>
                 <a:ea typeface="Microsoft YaHei"/>
               </a:rPr>
-              <a:t>本周先办这些</a:t>
+              <a:t>立即八事</a:t>
             </a:r>
           </a:p>
         </p:txBody>
@@ -9675,54 +10054,247 @@
                 <a:latin typeface="Microsoft YaHei"/>
                 <a:ea typeface="Microsoft YaHei"/>
               </a:rPr>
-              <a:t>转院只看三点。费用核 4 万元。现在不谈总赔偿数额</a:t>
-            </a:r>
-          </a:p>
-        </p:txBody>
-      </p:sp>
-      <p:sp>
-        <p:nvSpPr>
-          <p:cNvPr id="6" name="Rounded Rectangle 5"/>
-          <p:cNvSpPr/>
-          <p:nvPr/>
-        </p:nvSpPr>
-        <p:spPr>
-          <a:xfrm>
-            <a:off x="411480" y="1143000"/>
-            <a:ext cx="3657600" cy="2286000"/>
-          </a:xfrm>
-          <a:prstGeom prst="roundRect">
-            <a:avLst>
-              <a:gd name="adj" fmla="val 8000"/>
-            </a:avLst>
-          </a:prstGeom>
-          <a:solidFill>
-            <a:srgbClr val="F3F6FA"/>
-          </a:solidFill>
-          <a:ln>
-            <a:noFill/>
-          </a:ln>
-          <a:effectLst/>
-        </p:spPr>
-        <p:style>
-          <a:lnRef idx="1">
-            <a:schemeClr val="accent1"/>
-          </a:lnRef>
-          <a:fillRef idx="3">
-            <a:schemeClr val="accent1"/>
-          </a:fillRef>
-          <a:effectRef idx="2">
-            <a:schemeClr val="accent1"/>
-          </a:effectRef>
-          <a:fontRef idx="minor">
-            <a:schemeClr val="lt1"/>
-          </a:fontRef>
-        </p:style>
-        <p:txBody>
-          <a:bodyPr rtlCol="0" anchor="ctr"/>
-          <a:lstStyle/>
-          <a:p>
-            <a:pPr algn="ctr"/>
+              <a:t>律师看完监控再定程序。现在不谈总赔偿数额、不定残级</a:t>
+            </a:r>
+          </a:p>
+        </p:txBody>
+      </p:sp>
+      <p:sp>
+        <p:nvSpPr>
+          <p:cNvPr id="6" name="TextBox 5"/>
+          <p:cNvSpPr txBox="1"/>
+          <p:nvPr/>
+        </p:nvSpPr>
+        <p:spPr>
+          <a:xfrm>
+            <a:off x="502920" y="1097280"/>
+            <a:ext cx="11155680" cy="5212080"/>
+          </a:xfrm>
+          <a:prstGeom prst="rect">
+            <a:avLst/>
+          </a:prstGeom>
+          <a:noFill/>
+        </p:spPr>
+        <p:txBody>
+          <a:bodyPr wrap="square" lIns="0" rIns="0" tIns="0" bIns="0">
+            <a:spAutoFit/>
+          </a:bodyPr>
+          <a:lstStyle/>
+          <a:p>
+            <a:pPr algn="l">
+              <a:lnSpc>
+                <a:spcPct val="112000"/>
+              </a:lnSpc>
+            </a:pPr>
+            <a:r>
+              <a:rPr sz="1400" b="0">
+                <a:solidFill>
+                  <a:srgbClr val="C4A35A"/>
+                </a:solidFill>
+                <a:latin typeface="Microsoft YaHei"/>
+                <a:ea typeface="Microsoft YaHei"/>
+              </a:rPr>
+              <a:t>●  </a:t>
+            </a:r>
+            <a:r>
+              <a:rPr sz="1400" b="0">
+                <a:solidFill>
+                  <a:srgbClr val="1F2A37"/>
+                </a:solidFill>
+                <a:latin typeface="Microsoft YaHei"/>
+                <a:ea typeface="Microsoft YaHei"/>
+              </a:rPr>
+              <a:t>1. 向交警确认书面事故认定书的进度，并索取事故编号、监控保存情况及简易/一般程序的书面说明。</a:t>
+            </a:r>
+          </a:p>
+          <a:p>
+            <a:pPr algn="l">
+              <a:lnSpc>
+                <a:spcPct val="112000"/>
+              </a:lnSpc>
+            </a:pPr>
+            <a:r>
+              <a:rPr sz="1400" b="0">
+                <a:solidFill>
+                  <a:srgbClr val="C4A35A"/>
+                </a:solidFill>
+                <a:latin typeface="Microsoft YaHei"/>
+                <a:ea typeface="Microsoft YaHei"/>
+              </a:rPr>
+              <a:t>●  </a:t>
+            </a:r>
+            <a:r>
+              <a:rPr sz="1400" b="0">
+                <a:solidFill>
+                  <a:srgbClr val="1F2A37"/>
+                </a:solidFill>
+                <a:latin typeface="Microsoft YaHei"/>
+                <a:ea typeface="Microsoft YaHei"/>
+              </a:rPr>
+              <a:t>2. 在同意任何责任比例或程序选择前，让处理交通事故的本地律师查看监控和车辆材料，尤其评估一般程序可能带来的车辆与驾驶资格风险。</a:t>
+            </a:r>
+          </a:p>
+          <a:p>
+            <a:pPr algn="l">
+              <a:lnSpc>
+                <a:spcPct val="112000"/>
+              </a:lnSpc>
+            </a:pPr>
+            <a:r>
+              <a:rPr sz="1400" b="0">
+                <a:solidFill>
+                  <a:srgbClr val="C4A35A"/>
+                </a:solidFill>
+                <a:latin typeface="Microsoft YaHei"/>
+                <a:ea typeface="Microsoft YaHei"/>
+              </a:rPr>
+              <a:t>●  </a:t>
+            </a:r>
+            <a:r>
+              <a:rPr sz="1400" b="0">
+                <a:solidFill>
+                  <a:srgbClr val="1F2A37"/>
+                </a:solidFill>
+                <a:latin typeface="Microsoft YaHei"/>
+                <a:ea typeface="Microsoft YaHei"/>
+              </a:rPr>
+              <a:t>3. 向实际承保保险公司报案并取得书面答复，不再依赖交警、医院或非经办人员的口头判断。</a:t>
+            </a:r>
+          </a:p>
+          <a:p>
+            <a:pPr algn="l">
+              <a:lnSpc>
+                <a:spcPct val="112000"/>
+              </a:lnSpc>
+            </a:pPr>
+            <a:r>
+              <a:rPr sz="1400" b="0">
+                <a:solidFill>
+                  <a:srgbClr val="C4A35A"/>
+                </a:solidFill>
+                <a:latin typeface="Microsoft YaHei"/>
+                <a:ea typeface="Microsoft YaHei"/>
+              </a:rPr>
+              <a:t>●  </a:t>
+            </a:r>
+            <a:r>
+              <a:rPr sz="1400" b="0">
+                <a:solidFill>
+                  <a:srgbClr val="1F2A37"/>
+                </a:solidFill>
+                <a:latin typeface="Microsoft YaHei"/>
+                <a:ea typeface="Microsoft YaHei"/>
+              </a:rPr>
+              <a:t>4. 以医疗安全为先确定住院地点，补齐齐鲁医院出院结算、出院记录和市北区人民医院入院材料。</a:t>
+            </a:r>
+          </a:p>
+          <a:p>
+            <a:pPr algn="l">
+              <a:lnSpc>
+                <a:spcPct val="112000"/>
+              </a:lnSpc>
+            </a:pPr>
+            <a:r>
+              <a:rPr sz="1400" b="0">
+                <a:solidFill>
+                  <a:srgbClr val="C4A35A"/>
+                </a:solidFill>
+                <a:latin typeface="Microsoft YaHei"/>
+                <a:ea typeface="Microsoft YaHei"/>
+              </a:rPr>
+              <a:t>●  </a:t>
+            </a:r>
+            <a:r>
+              <a:rPr sz="1400" b="0">
+                <a:solidFill>
+                  <a:srgbClr val="1F2A37"/>
+                </a:solidFill>
+                <a:latin typeface="Microsoft YaHei"/>
+                <a:ea typeface="Microsoft YaHei"/>
+              </a:rPr>
+              <a:t>5. 立即建立费用台账，逐笔核清 4 万元金额。</a:t>
+            </a:r>
+          </a:p>
+          <a:p>
+            <a:pPr algn="l">
+              <a:lnSpc>
+                <a:spcPct val="112000"/>
+              </a:lnSpc>
+            </a:pPr>
+            <a:r>
+              <a:rPr sz="1400" b="0">
+                <a:solidFill>
+                  <a:srgbClr val="C4A35A"/>
+                </a:solidFill>
+                <a:latin typeface="Microsoft YaHei"/>
+                <a:ea typeface="Microsoft YaHei"/>
+              </a:rPr>
+              <a:t>●  </a:t>
+            </a:r>
+            <a:r>
+              <a:rPr sz="1400" b="0">
+                <a:solidFill>
+                  <a:srgbClr val="1F2A37"/>
+                </a:solidFill>
+                <a:latin typeface="Microsoft YaHei"/>
+                <a:ea typeface="Microsoft YaHei"/>
+              </a:rPr>
+              <a:t>6. 保存事故监控、全部病历、票据、转运材料及沟通记录原件和电子备份。</a:t>
+            </a:r>
+          </a:p>
+          <a:p>
+            <a:pPr algn="l">
+              <a:lnSpc>
+                <a:spcPct val="112000"/>
+              </a:lnSpc>
+            </a:pPr>
+            <a:r>
+              <a:rPr sz="1400" b="0">
+                <a:solidFill>
+                  <a:srgbClr val="C4A35A"/>
+                </a:solidFill>
+                <a:latin typeface="Microsoft YaHei"/>
+                <a:ea typeface="Microsoft YaHei"/>
+              </a:rPr>
+              <a:t>●  </a:t>
+            </a:r>
+            <a:r>
+              <a:rPr sz="1400" b="0">
+                <a:solidFill>
+                  <a:srgbClr val="1F2A37"/>
+                </a:solidFill>
+                <a:latin typeface="Microsoft YaHei"/>
+                <a:ea typeface="Microsoft YaHei"/>
+              </a:rPr>
+              <a:t>7. 核实伤者与用工方关系、车辆归属、工资结算和事故当日工作任务，为可能的工伤或用工责任主张留证。</a:t>
+            </a:r>
+          </a:p>
+          <a:p>
+            <a:pPr algn="l">
+              <a:lnSpc>
+                <a:spcPct val="112000"/>
+              </a:lnSpc>
+            </a:pPr>
+            <a:r>
+              <a:rPr sz="1400" b="0">
+                <a:solidFill>
+                  <a:srgbClr val="C4A35A"/>
+                </a:solidFill>
+                <a:latin typeface="Microsoft YaHei"/>
+                <a:ea typeface="Microsoft YaHei"/>
+              </a:rPr>
+              <a:t>●  </a:t>
+            </a:r>
+            <a:r>
+              <a:rPr sz="1400" b="0">
+                <a:solidFill>
+                  <a:srgbClr val="1F2A37"/>
+                </a:solidFill>
+                <a:latin typeface="Microsoft YaHei"/>
+                <a:ea typeface="Microsoft YaHei"/>
+              </a:rPr>
+              <a:t>8. 待病情稳定并达到鉴定条件后，再由有资质机构进行伤残鉴定；不要根据录音中的推测提前确定等级或金额。</a:t>
+            </a:r>
           </a:p>
         </p:txBody>
       </p:sp>
@@ -9734,8 +10306,8 @@
         </p:nvSpPr>
         <p:spPr>
           <a:xfrm>
-            <a:off x="640080" y="1371600"/>
-            <a:ext cx="3200400" cy="411480"/>
+            <a:off x="457200" y="6510528"/>
+            <a:ext cx="9875520" cy="256032"/>
           </a:xfrm>
           <a:prstGeom prst="rect">
             <a:avLst/>
@@ -9750,14 +10322,14 @@
           <a:p>
             <a:pPr algn="l"/>
             <a:r>
-              <a:rPr sz="1800" b="1">
-                <a:solidFill>
-                  <a:srgbClr val="0B2F5B"/>
-                </a:solidFill>
-                <a:latin typeface="Microsoft YaHei"/>
-                <a:ea typeface="Microsoft YaHei"/>
-              </a:rPr>
-              <a:t>1  问齐鲁收回</a:t>
+              <a:rPr sz="1000" b="0">
+                <a:solidFill>
+                  <a:srgbClr val="5C6B7A"/>
+                </a:solidFill>
+                <a:latin typeface="Microsoft YaHei"/>
+                <a:ea typeface="Microsoft YaHei"/>
+              </a:rPr>
+              <a:t>青岛红枫路交通事故 · 内部材料 · 底稿 08-17 补充 08-19 · 伤残尚未鉴定</a:t>
             </a:r>
           </a:p>
         </p:txBody>
@@ -9765,668 +10337,6 @@
       <p:sp>
         <p:nvSpPr>
           <p:cNvPr id="8" name="TextBox 7"/>
-          <p:cNvSpPr txBox="1"/>
-          <p:nvPr/>
-        </p:nvSpPr>
-        <p:spPr>
-          <a:xfrm>
-            <a:off x="640080" y="1965960"/>
-            <a:ext cx="3200400" cy="1188720"/>
-          </a:xfrm>
-          <a:prstGeom prst="rect">
-            <a:avLst/>
-          </a:prstGeom>
-          <a:noFill/>
-        </p:spPr>
-        <p:txBody>
-          <a:bodyPr wrap="square" lIns="0" rIns="0" tIns="0" bIns="0" anchor="t">
-            <a:spAutoFit/>
-          </a:bodyPr>
-          <a:lstStyle/>
-          <a:p>
-            <a:pPr algn="l"/>
-            <a:r>
-              <a:rPr sz="1400" b="0">
-                <a:solidFill>
-                  <a:srgbClr val="1F2A37"/>
-                </a:solidFill>
-                <a:latin typeface="Microsoft YaHei"/>
-                <a:ea typeface="Microsoft YaHei"/>
-              </a:rPr>
-              <a:t>出院结算 + 问赛主任：术后两天能否收回</a:t>
-            </a:r>
-          </a:p>
-        </p:txBody>
-      </p:sp>
-      <p:sp>
-        <p:nvSpPr>
-          <p:cNvPr id="9" name="Rounded Rectangle 8"/>
-          <p:cNvSpPr/>
-          <p:nvPr/>
-        </p:nvSpPr>
-        <p:spPr>
-          <a:xfrm>
-            <a:off x="4251960" y="1143000"/>
-            <a:ext cx="3657600" cy="2286000"/>
-          </a:xfrm>
-          <a:prstGeom prst="roundRect">
-            <a:avLst>
-              <a:gd name="adj" fmla="val 8000"/>
-            </a:avLst>
-          </a:prstGeom>
-          <a:solidFill>
-            <a:srgbClr val="F3F6FA"/>
-          </a:solidFill>
-          <a:ln>
-            <a:noFill/>
-          </a:ln>
-          <a:effectLst/>
-        </p:spPr>
-        <p:style>
-          <a:lnRef idx="1">
-            <a:schemeClr val="accent1"/>
-          </a:lnRef>
-          <a:fillRef idx="3">
-            <a:schemeClr val="accent1"/>
-          </a:fillRef>
-          <a:effectRef idx="2">
-            <a:schemeClr val="accent1"/>
-          </a:effectRef>
-          <a:fontRef idx="minor">
-            <a:schemeClr val="lt1"/>
-          </a:fontRef>
-        </p:style>
-        <p:txBody>
-          <a:bodyPr rtlCol="0" anchor="ctr"/>
-          <a:lstStyle/>
-          <a:p>
-            <a:pPr algn="ctr"/>
-          </a:p>
-        </p:txBody>
-      </p:sp>
-      <p:sp>
-        <p:nvSpPr>
-          <p:cNvPr id="10" name="TextBox 9"/>
-          <p:cNvSpPr txBox="1"/>
-          <p:nvPr/>
-        </p:nvSpPr>
-        <p:spPr>
-          <a:xfrm>
-            <a:off x="4480560" y="1371600"/>
-            <a:ext cx="3200400" cy="411480"/>
-          </a:xfrm>
-          <a:prstGeom prst="rect">
-            <a:avLst/>
-          </a:prstGeom>
-          <a:noFill/>
-        </p:spPr>
-        <p:txBody>
-          <a:bodyPr wrap="square" lIns="0" rIns="0" tIns="0" bIns="0" anchor="t">
-            <a:spAutoFit/>
-          </a:bodyPr>
-          <a:lstStyle/>
-          <a:p>
-            <a:pPr algn="l"/>
-            <a:r>
-              <a:rPr sz="1800" b="1">
-                <a:solidFill>
-                  <a:srgbClr val="0B2F5B"/>
-                </a:solidFill>
-                <a:latin typeface="Microsoft YaHei"/>
-                <a:ea typeface="Microsoft YaHei"/>
-              </a:rPr>
-              <a:t>2  问美团险</a:t>
-            </a:r>
-          </a:p>
-        </p:txBody>
-      </p:sp>
-      <p:sp>
-        <p:nvSpPr>
-          <p:cNvPr id="11" name="TextBox 10"/>
-          <p:cNvSpPr txBox="1"/>
-          <p:nvPr/>
-        </p:nvSpPr>
-        <p:spPr>
-          <a:xfrm>
-            <a:off x="4480560" y="1965960"/>
-            <a:ext cx="3200400" cy="1188720"/>
-          </a:xfrm>
-          <a:prstGeom prst="rect">
-            <a:avLst/>
-          </a:prstGeom>
-          <a:noFill/>
-        </p:spPr>
-        <p:txBody>
-          <a:bodyPr wrap="square" lIns="0" rIns="0" tIns="0" bIns="0" anchor="t">
-            <a:spAutoFit/>
-          </a:bodyPr>
-          <a:lstStyle/>
-          <a:p>
-            <a:pPr algn="l"/>
-            <a:r>
-              <a:rPr sz="1400" b="0">
-                <a:solidFill>
-                  <a:srgbClr val="1F2A37"/>
-                </a:solidFill>
-                <a:latin typeface="Microsoft YaHei"/>
-                <a:ea typeface="Microsoft YaHei"/>
-              </a:rPr>
-              <a:t>报全称：市北区人民医院抚顺路院区</a:t>
-            </a:r>
-          </a:p>
-        </p:txBody>
-      </p:sp>
-      <p:sp>
-        <p:nvSpPr>
-          <p:cNvPr id="12" name="Rounded Rectangle 11"/>
-          <p:cNvSpPr/>
-          <p:nvPr/>
-        </p:nvSpPr>
-        <p:spPr>
-          <a:xfrm>
-            <a:off x="8092440" y="1143000"/>
-            <a:ext cx="3657600" cy="2286000"/>
-          </a:xfrm>
-          <a:prstGeom prst="roundRect">
-            <a:avLst>
-              <a:gd name="adj" fmla="val 8000"/>
-            </a:avLst>
-          </a:prstGeom>
-          <a:solidFill>
-            <a:srgbClr val="F3F6FA"/>
-          </a:solidFill>
-          <a:ln>
-            <a:noFill/>
-          </a:ln>
-          <a:effectLst/>
-        </p:spPr>
-        <p:style>
-          <a:lnRef idx="1">
-            <a:schemeClr val="accent1"/>
-          </a:lnRef>
-          <a:fillRef idx="3">
-            <a:schemeClr val="accent1"/>
-          </a:fillRef>
-          <a:effectRef idx="2">
-            <a:schemeClr val="accent1"/>
-          </a:effectRef>
-          <a:fontRef idx="minor">
-            <a:schemeClr val="lt1"/>
-          </a:fontRef>
-        </p:style>
-        <p:txBody>
-          <a:bodyPr rtlCol="0" anchor="ctr"/>
-          <a:lstStyle/>
-          <a:p>
-            <a:pPr algn="ctr"/>
-          </a:p>
-        </p:txBody>
-      </p:sp>
-      <p:sp>
-        <p:nvSpPr>
-          <p:cNvPr id="13" name="TextBox 12"/>
-          <p:cNvSpPr txBox="1"/>
-          <p:nvPr/>
-        </p:nvSpPr>
-        <p:spPr>
-          <a:xfrm>
-            <a:off x="8321040" y="1371600"/>
-            <a:ext cx="3200400" cy="411480"/>
-          </a:xfrm>
-          <a:prstGeom prst="rect">
-            <a:avLst/>
-          </a:prstGeom>
-          <a:noFill/>
-        </p:spPr>
-        <p:txBody>
-          <a:bodyPr wrap="square" lIns="0" rIns="0" tIns="0" bIns="0" anchor="t">
-            <a:spAutoFit/>
-          </a:bodyPr>
-          <a:lstStyle/>
-          <a:p>
-            <a:pPr algn="l"/>
-            <a:r>
-              <a:rPr sz="1800" b="1">
-                <a:solidFill>
-                  <a:srgbClr val="0B2F5B"/>
-                </a:solidFill>
-                <a:latin typeface="Microsoft YaHei"/>
-                <a:ea typeface="Microsoft YaHei"/>
-              </a:rPr>
-              <a:t>3  存病历发票</a:t>
-            </a:r>
-          </a:p>
-        </p:txBody>
-      </p:sp>
-      <p:sp>
-        <p:nvSpPr>
-          <p:cNvPr id="14" name="TextBox 13"/>
-          <p:cNvSpPr txBox="1"/>
-          <p:nvPr/>
-        </p:nvSpPr>
-        <p:spPr>
-          <a:xfrm>
-            <a:off x="8321040" y="1965960"/>
-            <a:ext cx="3200400" cy="1188720"/>
-          </a:xfrm>
-          <a:prstGeom prst="rect">
-            <a:avLst/>
-          </a:prstGeom>
-          <a:noFill/>
-        </p:spPr>
-        <p:txBody>
-          <a:bodyPr wrap="square" lIns="0" rIns="0" tIns="0" bIns="0" anchor="t">
-            <a:spAutoFit/>
-          </a:bodyPr>
-          <a:lstStyle/>
-          <a:p>
-            <a:pPr algn="l"/>
-            <a:r>
-              <a:rPr sz="1400" b="0">
-                <a:solidFill>
-                  <a:srgbClr val="1F2A37"/>
-                </a:solidFill>
-                <a:latin typeface="Microsoft YaHei"/>
-                <a:ea typeface="Microsoft YaHei"/>
-              </a:rPr>
-              <a:t>三份 CT、手术记录、费用明细</a:t>
-            </a:r>
-          </a:p>
-        </p:txBody>
-      </p:sp>
-      <p:sp>
-        <p:nvSpPr>
-          <p:cNvPr id="15" name="Rounded Rectangle 14"/>
-          <p:cNvSpPr/>
-          <p:nvPr/>
-        </p:nvSpPr>
-        <p:spPr>
-          <a:xfrm>
-            <a:off x="411480" y="3657600"/>
-            <a:ext cx="3657600" cy="2286000"/>
-          </a:xfrm>
-          <a:prstGeom prst="roundRect">
-            <a:avLst>
-              <a:gd name="adj" fmla="val 8000"/>
-            </a:avLst>
-          </a:prstGeom>
-          <a:solidFill>
-            <a:srgbClr val="F3F6FA"/>
-          </a:solidFill>
-          <a:ln>
-            <a:noFill/>
-          </a:ln>
-          <a:effectLst/>
-        </p:spPr>
-        <p:style>
-          <a:lnRef idx="1">
-            <a:schemeClr val="accent1"/>
-          </a:lnRef>
-          <a:fillRef idx="3">
-            <a:schemeClr val="accent1"/>
-          </a:fillRef>
-          <a:effectRef idx="2">
-            <a:schemeClr val="accent1"/>
-          </a:effectRef>
-          <a:fontRef idx="minor">
-            <a:schemeClr val="lt1"/>
-          </a:fontRef>
-        </p:style>
-        <p:txBody>
-          <a:bodyPr rtlCol="0" anchor="ctr"/>
-          <a:lstStyle/>
-          <a:p>
-            <a:pPr algn="ctr"/>
-          </a:p>
-        </p:txBody>
-      </p:sp>
-      <p:sp>
-        <p:nvSpPr>
-          <p:cNvPr id="16" name="TextBox 15"/>
-          <p:cNvSpPr txBox="1"/>
-          <p:nvPr/>
-        </p:nvSpPr>
-        <p:spPr>
-          <a:xfrm>
-            <a:off x="640080" y="3886200"/>
-            <a:ext cx="3200400" cy="411480"/>
-          </a:xfrm>
-          <a:prstGeom prst="rect">
-            <a:avLst/>
-          </a:prstGeom>
-          <a:noFill/>
-        </p:spPr>
-        <p:txBody>
-          <a:bodyPr wrap="square" lIns="0" rIns="0" tIns="0" bIns="0" anchor="t">
-            <a:spAutoFit/>
-          </a:bodyPr>
-          <a:lstStyle/>
-          <a:p>
-            <a:pPr algn="l"/>
-            <a:r>
-              <a:rPr sz="1800" b="1">
-                <a:solidFill>
-                  <a:srgbClr val="0B2F5B"/>
-                </a:solidFill>
-                <a:latin typeface="Microsoft YaHei"/>
-                <a:ea typeface="Microsoft YaHei"/>
-              </a:rPr>
-              <a:t>4  公对公留痕</a:t>
-            </a:r>
-          </a:p>
-        </p:txBody>
-      </p:sp>
-      <p:sp>
-        <p:nvSpPr>
-          <p:cNvPr id="17" name="TextBox 16"/>
-          <p:cNvSpPr txBox="1"/>
-          <p:nvPr/>
-        </p:nvSpPr>
-        <p:spPr>
-          <a:xfrm>
-            <a:off x="640080" y="4480560"/>
-            <a:ext cx="3200400" cy="1188720"/>
-          </a:xfrm>
-          <a:prstGeom prst="rect">
-            <a:avLst/>
-          </a:prstGeom>
-          <a:noFill/>
-        </p:spPr>
-        <p:txBody>
-          <a:bodyPr wrap="square" lIns="0" rIns="0" tIns="0" bIns="0" anchor="t">
-            <a:spAutoFit/>
-          </a:bodyPr>
-          <a:lstStyle/>
-          <a:p>
-            <a:pPr algn="l"/>
-            <a:r>
-              <a:rPr sz="1400" b="0">
-                <a:solidFill>
-                  <a:srgbClr val="1F2A37"/>
-                </a:solidFill>
-                <a:latin typeface="Microsoft YaHei"/>
-                <a:ea typeface="Microsoft YaHei"/>
-              </a:rPr>
-              <a:t>交警电话给赛主任，不换号不代扮</a:t>
-            </a:r>
-          </a:p>
-        </p:txBody>
-      </p:sp>
-      <p:sp>
-        <p:nvSpPr>
-          <p:cNvPr id="18" name="Rounded Rectangle 17"/>
-          <p:cNvSpPr/>
-          <p:nvPr/>
-        </p:nvSpPr>
-        <p:spPr>
-          <a:xfrm>
-            <a:off x="4251960" y="3657600"/>
-            <a:ext cx="3657600" cy="2286000"/>
-          </a:xfrm>
-          <a:prstGeom prst="roundRect">
-            <a:avLst>
-              <a:gd name="adj" fmla="val 8000"/>
-            </a:avLst>
-          </a:prstGeom>
-          <a:solidFill>
-            <a:srgbClr val="F3F6FA"/>
-          </a:solidFill>
-          <a:ln>
-            <a:noFill/>
-          </a:ln>
-          <a:effectLst/>
-        </p:spPr>
-        <p:style>
-          <a:lnRef idx="1">
-            <a:schemeClr val="accent1"/>
-          </a:lnRef>
-          <a:fillRef idx="3">
-            <a:schemeClr val="accent1"/>
-          </a:fillRef>
-          <a:effectRef idx="2">
-            <a:schemeClr val="accent1"/>
-          </a:effectRef>
-          <a:fontRef idx="minor">
-            <a:schemeClr val="lt1"/>
-          </a:fontRef>
-        </p:style>
-        <p:txBody>
-          <a:bodyPr rtlCol="0" anchor="ctr"/>
-          <a:lstStyle/>
-          <a:p>
-            <a:pPr algn="ctr"/>
-          </a:p>
-        </p:txBody>
-      </p:sp>
-      <p:sp>
-        <p:nvSpPr>
-          <p:cNvPr id="19" name="TextBox 18"/>
-          <p:cNvSpPr txBox="1"/>
-          <p:nvPr/>
-        </p:nvSpPr>
-        <p:spPr>
-          <a:xfrm>
-            <a:off x="4480560" y="3886200"/>
-            <a:ext cx="3200400" cy="411480"/>
-          </a:xfrm>
-          <a:prstGeom prst="rect">
-            <a:avLst/>
-          </a:prstGeom>
-          <a:noFill/>
-        </p:spPr>
-        <p:txBody>
-          <a:bodyPr wrap="square" lIns="0" rIns="0" tIns="0" bIns="0" anchor="t">
-            <a:spAutoFit/>
-          </a:bodyPr>
-          <a:lstStyle/>
-          <a:p>
-            <a:pPr algn="l"/>
-            <a:r>
-              <a:rPr sz="1800" b="1">
-                <a:solidFill>
-                  <a:srgbClr val="0B2F5B"/>
-                </a:solidFill>
-                <a:latin typeface="Microsoft YaHei"/>
-                <a:ea typeface="Microsoft YaHei"/>
-              </a:rPr>
-              <a:t>5  保险进群</a:t>
-            </a:r>
-          </a:p>
-        </p:txBody>
-      </p:sp>
-      <p:sp>
-        <p:nvSpPr>
-          <p:cNvPr id="20" name="TextBox 19"/>
-          <p:cNvSpPr txBox="1"/>
-          <p:nvPr/>
-        </p:nvSpPr>
-        <p:spPr>
-          <a:xfrm>
-            <a:off x="4480560" y="4480560"/>
-            <a:ext cx="3200400" cy="1188720"/>
-          </a:xfrm>
-          <a:prstGeom prst="rect">
-            <a:avLst/>
-          </a:prstGeom>
-          <a:noFill/>
-        </p:spPr>
-        <p:txBody>
-          <a:bodyPr wrap="square" lIns="0" rIns="0" tIns="0" bIns="0" anchor="t">
-            <a:spAutoFit/>
-          </a:bodyPr>
-          <a:lstStyle/>
-          <a:p>
-            <a:pPr algn="l"/>
-            <a:r>
-              <a:rPr sz="1400" b="0">
-                <a:solidFill>
-                  <a:srgbClr val="1F2A37"/>
-                </a:solidFill>
-                <a:latin typeface="Microsoft YaHei"/>
-                <a:ea typeface="Microsoft YaHei"/>
-              </a:rPr>
-              <a:t>本周见到骑手，平台和保险进群</a:t>
-            </a:r>
-          </a:p>
-        </p:txBody>
-      </p:sp>
-      <p:sp>
-        <p:nvSpPr>
-          <p:cNvPr id="21" name="Rounded Rectangle 20"/>
-          <p:cNvSpPr/>
-          <p:nvPr/>
-        </p:nvSpPr>
-        <p:spPr>
-          <a:xfrm>
-            <a:off x="8092440" y="3657600"/>
-            <a:ext cx="3657600" cy="2286000"/>
-          </a:xfrm>
-          <a:prstGeom prst="roundRect">
-            <a:avLst>
-              <a:gd name="adj" fmla="val 8000"/>
-            </a:avLst>
-          </a:prstGeom>
-          <a:solidFill>
-            <a:srgbClr val="F3F6FA"/>
-          </a:solidFill>
-          <a:ln>
-            <a:noFill/>
-          </a:ln>
-          <a:effectLst/>
-        </p:spPr>
-        <p:style>
-          <a:lnRef idx="1">
-            <a:schemeClr val="accent1"/>
-          </a:lnRef>
-          <a:fillRef idx="3">
-            <a:schemeClr val="accent1"/>
-          </a:fillRef>
-          <a:effectRef idx="2">
-            <a:schemeClr val="accent1"/>
-          </a:effectRef>
-          <a:fontRef idx="minor">
-            <a:schemeClr val="lt1"/>
-          </a:fontRef>
-        </p:style>
-        <p:txBody>
-          <a:bodyPr rtlCol="0" anchor="ctr"/>
-          <a:lstStyle/>
-          <a:p>
-            <a:pPr algn="ctr"/>
-          </a:p>
-        </p:txBody>
-      </p:sp>
-      <p:sp>
-        <p:nvSpPr>
-          <p:cNvPr id="22" name="TextBox 21"/>
-          <p:cNvSpPr txBox="1"/>
-          <p:nvPr/>
-        </p:nvSpPr>
-        <p:spPr>
-          <a:xfrm>
-            <a:off x="8321040" y="3886200"/>
-            <a:ext cx="3200400" cy="411480"/>
-          </a:xfrm>
-          <a:prstGeom prst="rect">
-            <a:avLst/>
-          </a:prstGeom>
-          <a:noFill/>
-        </p:spPr>
-        <p:txBody>
-          <a:bodyPr wrap="square" lIns="0" rIns="0" tIns="0" bIns="0" anchor="t">
-            <a:spAutoFit/>
-          </a:bodyPr>
-          <a:lstStyle/>
-          <a:p>
-            <a:pPr algn="l"/>
-            <a:r>
-              <a:rPr sz="1800" b="1">
-                <a:solidFill>
-                  <a:srgbClr val="0B2F5B"/>
-                </a:solidFill>
-                <a:latin typeface="Microsoft YaHei"/>
-                <a:ea typeface="Microsoft YaHei"/>
-              </a:rPr>
-              <a:t>6  只谈已发生费用</a:t>
-            </a:r>
-          </a:p>
-        </p:txBody>
-      </p:sp>
-      <p:sp>
-        <p:nvSpPr>
-          <p:cNvPr id="23" name="TextBox 22"/>
-          <p:cNvSpPr txBox="1"/>
-          <p:nvPr/>
-        </p:nvSpPr>
-        <p:spPr>
-          <a:xfrm>
-            <a:off x="8321040" y="4480560"/>
-            <a:ext cx="3200400" cy="1188720"/>
-          </a:xfrm>
-          <a:prstGeom prst="rect">
-            <a:avLst/>
-          </a:prstGeom>
-          <a:noFill/>
-        </p:spPr>
-        <p:txBody>
-          <a:bodyPr wrap="square" lIns="0" rIns="0" tIns="0" bIns="0" anchor="t">
-            <a:spAutoFit/>
-          </a:bodyPr>
-          <a:lstStyle/>
-          <a:p>
-            <a:pPr algn="l"/>
-            <a:r>
-              <a:rPr sz="1400" b="0">
-                <a:solidFill>
-                  <a:srgbClr val="1F2A37"/>
-                </a:solidFill>
-                <a:latin typeface="Microsoft YaHei"/>
-                <a:ea typeface="Microsoft YaHei"/>
-              </a:rPr>
-              <a:t>不谈总赔偿数额，不报残级，不签了结</a:t>
-            </a:r>
-          </a:p>
-        </p:txBody>
-      </p:sp>
-      <p:sp>
-        <p:nvSpPr>
-          <p:cNvPr id="24" name="TextBox 23"/>
-          <p:cNvSpPr txBox="1"/>
-          <p:nvPr/>
-        </p:nvSpPr>
-        <p:spPr>
-          <a:xfrm>
-            <a:off x="457200" y="6510528"/>
-            <a:ext cx="9875520" cy="256032"/>
-          </a:xfrm>
-          <a:prstGeom prst="rect">
-            <a:avLst/>
-          </a:prstGeom>
-          <a:noFill/>
-        </p:spPr>
-        <p:txBody>
-          <a:bodyPr wrap="square" lIns="0" rIns="0" tIns="0" bIns="0" anchor="t">
-            <a:spAutoFit/>
-          </a:bodyPr>
-          <a:lstStyle/>
-          <a:p>
-            <a:pPr algn="l"/>
-            <a:r>
-              <a:rPr sz="1000" b="0">
-                <a:solidFill>
-                  <a:srgbClr val="5C6B7A"/>
-                </a:solidFill>
-                <a:latin typeface="Microsoft YaHei"/>
-                <a:ea typeface="Microsoft YaHei"/>
-              </a:rPr>
-              <a:t>青岛红枫路交通事故 · 内部材料 · 底稿 08-17 补充 08-19 · 伤残尚未鉴定</a:t>
-            </a:r>
-          </a:p>
-        </p:txBody>
-      </p:sp>
-      <p:sp>
-        <p:nvSpPr>
-          <p:cNvPr id="25" name="TextBox 24"/>
           <p:cNvSpPr txBox="1"/>
           <p:nvPr/>
         </p:nvSpPr>

--- a/deliverables/青岛红枫路交通事故_伤情与伤残简报_20260817.pptx
+++ b/deliverables/青岛红枫路交通事故_伤情与伤残简报_20260817.pptx
@@ -9742,7 +9742,7 @@
                 <a:latin typeface="Microsoft YaHei"/>
                 <a:ea typeface="Microsoft YaHei"/>
               </a:rPr>
-              <a:t>3. 向实际承保公司书面确认二甲赔付资格和比例</a:t>
+              <a:t>3. 向实际承保公司书面确认二甲医院的赔付资格和比例</a:t>
             </a:r>
           </a:p>
         </p:txBody>
